--- a/slides/11-02-who-attacks-and-how.pptx
+++ b/slides/11-02-who-attacks-and-how.pptx
@@ -3514,7 +3514,7 @@
         <p:spPr>
           <a:xfrm>
             <a:off x="457200" y="1508760"/>
-            <a:ext cx="8229600" cy="320040"/>
+            <a:ext cx="4937760" cy="320040"/>
           </a:xfrm>
           <a:prstGeom prst="rect">
             <a:avLst/>
@@ -3553,7 +3553,7 @@
         <p:spPr>
           <a:xfrm>
             <a:off x="457200" y="1874520"/>
-            <a:ext cx="8229600" cy="1188720"/>
+            <a:ext cx="4937760" cy="1188720"/>
           </a:xfrm>
           <a:prstGeom prst="rect">
             <a:avLst/>
@@ -3569,7 +3569,7 @@
               <a:buNone/>
             </a:pPr>
             <a:r>
-              <a:rPr lang="en-US" sz="3600" b="1" dirty="0">
+              <a:rPr lang="en-US" sz="3200" b="1" dirty="0">
                 <a:solidFill>
                   <a:srgbClr val="FFFFFF"/>
                 </a:solidFill>
@@ -3579,7 +3579,7 @@
               </a:rPr>
               <a:t>Who attacks and how</a:t>
             </a:r>
-            <a:endParaRPr lang="en-US" sz="3600" dirty="0"/>
+            <a:endParaRPr lang="en-US" sz="3200" dirty="0"/>
           </a:p>
         </p:txBody>
       </p:sp>
@@ -3642,7 +3642,7 @@
         <p:spPr>
           <a:xfrm>
             <a:off x="457200" y="3383280"/>
-            <a:ext cx="8229600" cy="822960"/>
+            <a:ext cx="4937760" cy="822960"/>
           </a:xfrm>
           <a:prstGeom prst="rect">
             <a:avLst/>
@@ -3691,7 +3691,95 @@
       </p:sp>
       <p:sp>
         <p:nvSpPr>
-          <p:cNvPr id="9" name="Text 6"/>
+          <p:cNvPr id="9" name="Shape 6"/>
+          <p:cNvSpPr/>
+          <p:nvPr/>
+        </p:nvSpPr>
+        <p:spPr>
+          <a:xfrm>
+            <a:off x="5440680" y="502920"/>
+            <a:ext cx="3383280" cy="3931920"/>
+          </a:xfrm>
+          <a:prstGeom prst="ellipse">
+            <a:avLst/>
+          </a:prstGeom>
+          <a:solidFill>
+            <a:srgbClr val="3A3F33"/>
+          </a:solidFill>
+          <a:ln w="12700">
+            <a:solidFill>
+              <a:srgbClr val="3A3F33"/>
+            </a:solidFill>
+            <a:prstDash val="solid"/>
+          </a:ln>
+        </p:spPr>
+      </p:sp>
+      <p:pic>
+        <p:nvPicPr>
+          <p:cNvPr id="10" name="Image 1" descr="attacker">    </p:cNvPr>
+          <p:cNvPicPr>
+            <a:picLocks noChangeAspect="1"/>
+          </p:cNvPicPr>
+          <p:nvPr/>
+        </p:nvPicPr>
+        <p:blipFill>
+          <a:blip r:embed="rId2"/>
+          <a:stretch>
+            <a:fillRect/>
+          </a:stretch>
+        </p:blipFill>
+        <p:spPr>
+          <a:xfrm>
+            <a:off x="5394960" y="1217981"/>
+            <a:ext cx="3474720" cy="2501798"/>
+          </a:xfrm>
+          <a:prstGeom prst="rect">
+            <a:avLst/>
+          </a:prstGeom>
+        </p:spPr>
+      </p:pic>
+      <p:sp>
+        <p:nvSpPr>
+          <p:cNvPr id="11" name="Text 7"/>
+          <p:cNvSpPr txBox="1"/>
+          <p:nvPr/>
+        </p:nvSpPr>
+        <p:spPr>
+          <a:xfrm>
+            <a:off x="457200" y="4526280"/>
+            <a:ext cx="8229600" cy="201168"/>
+          </a:xfrm>
+          <a:prstGeom prst="rect">
+            <a:avLst/>
+          </a:prstGeom>
+          <a:noFill/>
+          <a:ln/>
+        </p:spPr>
+        <p:txBody>
+          <a:bodyPr wrap="square" lIns="0" tIns="0" rIns="0" bIns="0" rtlCol="0" anchor="ctr"/>
+          <a:lstStyle/>
+          <a:p>
+            <a:pPr indent="0" marL="0">
+              <a:buNone/>
+            </a:pPr>
+            <a:r>
+              <a:rPr lang="en-US" sz="750" dirty="0">
+                <a:solidFill>
+                  <a:srgbClr val="A39E98"/>
+                </a:solidFill>
+                <a:latin typeface="Open Sans" pitchFamily="34" charset="0"/>
+                <a:ea typeface="Open Sans" pitchFamily="34" charset="-122"/>
+                <a:cs typeface="Open Sans" pitchFamily="34" charset="-120"/>
+              </a:rPr>
+              <a:t>© 2026 Niranga Dharmaratna. Licensed CC BY-NC-SA 4.0. Icons: Font Awesome Free (CC BY 4.0). Illustrations: original, same licence.</a:t>
+            </a:r>
+            <a:endParaRPr lang="en-US" sz="750" dirty="0"/>
+          </a:p>
+        </p:txBody>
+      </p:sp>
+      <p:sp>
+        <p:nvSpPr>
+          <p:cNvPr id="12" name="Text 8"/>
           <p:cNvSpPr txBox="1"/>
           <p:nvPr/>
         </p:nvSpPr>
@@ -3730,7 +3818,7 @@
       </p:sp>
       <p:sp>
         <p:nvSpPr>
-          <p:cNvPr id="10" name="Text 7"/>
+          <p:cNvPr id="13" name="Text 9"/>
           <p:cNvSpPr txBox="1"/>
           <p:nvPr/>
         </p:nvSpPr>
@@ -5927,7 +6015,97 @@
       </p:sp>
       <p:sp>
         <p:nvSpPr>
-          <p:cNvPr id="11" name="Text 8"/>
+          <p:cNvPr id="11" name="Shape 8"/>
+          <p:cNvSpPr/>
+          <p:nvPr/>
+        </p:nvSpPr>
+        <p:spPr>
+          <a:xfrm>
+            <a:off x="6949440" y="2697480"/>
+            <a:ext cx="1737360" cy="1965960"/>
+          </a:xfrm>
+          <a:prstGeom prst="roundRect">
+            <a:avLst>
+              <a:gd name="adj" fmla="val 4211"/>
+            </a:avLst>
+          </a:prstGeom>
+          <a:solidFill>
+            <a:srgbClr val="FFFFFF"/>
+          </a:solidFill>
+          <a:ln w="12700">
+            <a:solidFill>
+              <a:srgbClr val="FFFFFF"/>
+            </a:solidFill>
+            <a:prstDash val="solid"/>
+          </a:ln>
+        </p:spPr>
+      </p:sp>
+      <p:pic>
+        <p:nvPicPr>
+          <p:cNvPr id="12" name="Image 1" descr="QR code for Attacker Profiler">    </p:cNvPr>
+          <p:cNvPicPr>
+            <a:picLocks noChangeAspect="1"/>
+          </p:cNvPicPr>
+          <p:nvPr/>
+        </p:nvPicPr>
+        <p:blipFill>
+          <a:blip r:embed="rId2"/>
+          <a:stretch>
+            <a:fillRect/>
+          </a:stretch>
+        </p:blipFill>
+        <p:spPr>
+          <a:xfrm>
+            <a:off x="7059168" y="2770632"/>
+            <a:ext cx="1517904" cy="1517904"/>
+          </a:xfrm>
+          <a:prstGeom prst="rect">
+            <a:avLst/>
+          </a:prstGeom>
+        </p:spPr>
+      </p:pic>
+      <p:sp>
+        <p:nvSpPr>
+          <p:cNvPr id="13" name="Text 9"/>
+          <p:cNvSpPr txBox="1"/>
+          <p:nvPr/>
+        </p:nvSpPr>
+        <p:spPr>
+          <a:xfrm>
+            <a:off x="6949440" y="4315968"/>
+            <a:ext cx="1737360" cy="256032"/>
+          </a:xfrm>
+          <a:prstGeom prst="rect">
+            <a:avLst/>
+          </a:prstGeom>
+          <a:noFill/>
+          <a:ln/>
+        </p:spPr>
+        <p:txBody>
+          <a:bodyPr wrap="square" lIns="0" tIns="0" rIns="0" bIns="0" rtlCol="0" anchor="ctr"/>
+          <a:lstStyle/>
+          <a:p>
+            <a:pPr algn="ctr" indent="0" marL="0">
+              <a:buNone/>
+            </a:pPr>
+            <a:r>
+              <a:rPr lang="en-US" sz="1100" b="1" dirty="0">
+                <a:solidFill>
+                  <a:srgbClr val="262A20"/>
+                </a:solidFill>
+                <a:latin typeface="Open Sans" pitchFamily="34" charset="0"/>
+                <a:ea typeface="Open Sans" pitchFamily="34" charset="-122"/>
+                <a:cs typeface="Open Sans" pitchFamily="34" charset="-120"/>
+              </a:rPr>
+              <a:t>Scan to play</a:t>
+            </a:r>
+            <a:endParaRPr lang="en-US" sz="1100" dirty="0"/>
+          </a:p>
+        </p:txBody>
+      </p:sp>
+      <p:sp>
+        <p:nvSpPr>
+          <p:cNvPr id="14" name="Text 10"/>
           <p:cNvSpPr txBox="1"/>
           <p:nvPr/>
         </p:nvSpPr>
@@ -5966,7 +6144,7 @@
       </p:sp>
       <p:sp>
         <p:nvSpPr>
-          <p:cNvPr id="12" name="Text 9"/>
+          <p:cNvPr id="15" name="Text 11"/>
           <p:cNvSpPr txBox="1"/>
           <p:nvPr/>
         </p:nvSpPr>
@@ -7362,7 +7540,97 @@
       </p:sp>
       <p:sp>
         <p:nvSpPr>
-          <p:cNvPr id="11" name="Text 8"/>
+          <p:cNvPr id="11" name="Shape 8"/>
+          <p:cNvSpPr/>
+          <p:nvPr/>
+        </p:nvSpPr>
+        <p:spPr>
+          <a:xfrm>
+            <a:off x="6949440" y="2697480"/>
+            <a:ext cx="1737360" cy="1965960"/>
+          </a:xfrm>
+          <a:prstGeom prst="roundRect">
+            <a:avLst>
+              <a:gd name="adj" fmla="val 4211"/>
+            </a:avLst>
+          </a:prstGeom>
+          <a:solidFill>
+            <a:srgbClr val="FFFFFF"/>
+          </a:solidFill>
+          <a:ln w="12700">
+            <a:solidFill>
+              <a:srgbClr val="FFFFFF"/>
+            </a:solidFill>
+            <a:prstDash val="solid"/>
+          </a:ln>
+        </p:spPr>
+      </p:sp>
+      <p:pic>
+        <p:nvPicPr>
+          <p:cNvPr id="12" name="Image 1" descr="QR code for Attack Lab">    </p:cNvPr>
+          <p:cNvPicPr>
+            <a:picLocks noChangeAspect="1"/>
+          </p:cNvPicPr>
+          <p:nvPr/>
+        </p:nvPicPr>
+        <p:blipFill>
+          <a:blip r:embed="rId2"/>
+          <a:stretch>
+            <a:fillRect/>
+          </a:stretch>
+        </p:blipFill>
+        <p:spPr>
+          <a:xfrm>
+            <a:off x="7059168" y="2770632"/>
+            <a:ext cx="1517904" cy="1517904"/>
+          </a:xfrm>
+          <a:prstGeom prst="rect">
+            <a:avLst/>
+          </a:prstGeom>
+        </p:spPr>
+      </p:pic>
+      <p:sp>
+        <p:nvSpPr>
+          <p:cNvPr id="13" name="Text 9"/>
+          <p:cNvSpPr txBox="1"/>
+          <p:nvPr/>
+        </p:nvSpPr>
+        <p:spPr>
+          <a:xfrm>
+            <a:off x="6949440" y="4315968"/>
+            <a:ext cx="1737360" cy="256032"/>
+          </a:xfrm>
+          <a:prstGeom prst="rect">
+            <a:avLst/>
+          </a:prstGeom>
+          <a:noFill/>
+          <a:ln/>
+        </p:spPr>
+        <p:txBody>
+          <a:bodyPr wrap="square" lIns="0" tIns="0" rIns="0" bIns="0" rtlCol="0" anchor="ctr"/>
+          <a:lstStyle/>
+          <a:p>
+            <a:pPr algn="ctr" indent="0" marL="0">
+              <a:buNone/>
+            </a:pPr>
+            <a:r>
+              <a:rPr lang="en-US" sz="1100" b="1" dirty="0">
+                <a:solidFill>
+                  <a:srgbClr val="262A20"/>
+                </a:solidFill>
+                <a:latin typeface="Open Sans" pitchFamily="34" charset="0"/>
+                <a:ea typeface="Open Sans" pitchFamily="34" charset="-122"/>
+                <a:cs typeface="Open Sans" pitchFamily="34" charset="-120"/>
+              </a:rPr>
+              <a:t>Scan to play</a:t>
+            </a:r>
+            <a:endParaRPr lang="en-US" sz="1100" dirty="0"/>
+          </a:p>
+        </p:txBody>
+      </p:sp>
+      <p:sp>
+        <p:nvSpPr>
+          <p:cNvPr id="14" name="Text 10"/>
           <p:cNvSpPr txBox="1"/>
           <p:nvPr/>
         </p:nvSpPr>
@@ -7401,7 +7669,7 @@
       </p:sp>
       <p:sp>
         <p:nvSpPr>
-          <p:cNvPr id="12" name="Text 9"/>
+          <p:cNvPr id="15" name="Text 11"/>
           <p:cNvSpPr txBox="1"/>
           <p:nvPr/>
         </p:nvSpPr>
@@ -9662,7 +9930,7 @@
         <p:spPr>
           <a:xfrm>
             <a:off x="1097280" y="1188720"/>
-            <a:ext cx="7132320" cy="2011680"/>
+            <a:ext cx="4572000" cy="2011680"/>
           </a:xfrm>
           <a:prstGeom prst="rect">
             <a:avLst/>
@@ -9678,7 +9946,7 @@
               <a:buNone/>
             </a:pPr>
             <a:r>
-              <a:rPr lang="en-US" sz="2800" b="1" dirty="0">
+              <a:rPr lang="en-US" sz="2400" b="1" dirty="0">
                 <a:solidFill>
                   <a:srgbClr val="FFFFFF"/>
                 </a:solidFill>
@@ -9688,7 +9956,7 @@
               </a:rPr>
               <a:t>Monday, 8:15 am. A message appears on the accounts computer: "Your files are locked. Pay to get them back."</a:t>
             </a:r>
-            <a:endParaRPr lang="en-US" sz="2800" dirty="0"/>
+            <a:endParaRPr lang="en-US" sz="2400" dirty="0"/>
           </a:p>
         </p:txBody>
       </p:sp>
@@ -9701,16 +9969,16 @@
         <p:spPr>
           <a:xfrm>
             <a:off x="1097280" y="3383280"/>
-            <a:ext cx="7132320" cy="457200"/>
-          </a:xfrm>
-          <a:prstGeom prst="rect">
-            <a:avLst/>
-          </a:prstGeom>
-          <a:noFill/>
-          <a:ln/>
-        </p:spPr>
-        <p:txBody>
-          <a:bodyPr wrap="square" lIns="0" tIns="0" rIns="0" bIns="0" rtlCol="0" anchor="ctr"/>
+            <a:ext cx="4572000" cy="548640"/>
+          </a:xfrm>
+          <a:prstGeom prst="rect">
+            <a:avLst/>
+          </a:prstGeom>
+          <a:noFill/>
+          <a:ln/>
+        </p:spPr>
+        <p:txBody>
+          <a:bodyPr wrap="square" lIns="0" tIns="0" rIns="0" bIns="0" rtlCol="0" anchor="t"/>
           <a:lstStyle/>
           <a:p>
             <a:pPr indent="0" marL="0">
@@ -9733,7 +10001,56 @@
       </p:sp>
       <p:sp>
         <p:nvSpPr>
-          <p:cNvPr id="5" name="Text 3"/>
+          <p:cNvPr id="5" name="Shape 3"/>
+          <p:cNvSpPr/>
+          <p:nvPr/>
+        </p:nvSpPr>
+        <p:spPr>
+          <a:xfrm>
+            <a:off x="5806440" y="548640"/>
+            <a:ext cx="3017520" cy="3840480"/>
+          </a:xfrm>
+          <a:prstGeom prst="ellipse">
+            <a:avLst/>
+          </a:prstGeom>
+          <a:solidFill>
+            <a:srgbClr val="3A3F33"/>
+          </a:solidFill>
+          <a:ln w="12700">
+            <a:solidFill>
+              <a:srgbClr val="3A3F33"/>
+            </a:solidFill>
+            <a:prstDash val="solid"/>
+          </a:ln>
+        </p:spPr>
+      </p:sp>
+      <p:pic>
+        <p:nvPicPr>
+          <p:cNvPr id="6" name="Image 0" descr="clerk_locked">    </p:cNvPr>
+          <p:cNvPicPr>
+            <a:picLocks noChangeAspect="1"/>
+          </p:cNvPicPr>
+          <p:nvPr/>
+        </p:nvPicPr>
+        <p:blipFill>
+          <a:blip r:embed="rId1"/>
+          <a:stretch>
+            <a:fillRect/>
+          </a:stretch>
+        </p:blipFill>
+        <p:spPr>
+          <a:xfrm>
+            <a:off x="5760720" y="1428673"/>
+            <a:ext cx="3108960" cy="2080414"/>
+          </a:xfrm>
+          <a:prstGeom prst="rect">
+            <a:avLst/>
+          </a:prstGeom>
+        </p:spPr>
+      </p:pic>
+      <p:sp>
+        <p:nvSpPr>
+          <p:cNvPr id="7" name="Text 4"/>
           <p:cNvSpPr txBox="1"/>
           <p:nvPr/>
         </p:nvSpPr>
@@ -9772,7 +10089,7 @@
       </p:sp>
       <p:sp>
         <p:nvSpPr>
-          <p:cNvPr id="6" name="Text 4"/>
+          <p:cNvPr id="8" name="Text 5"/>
           <p:cNvSpPr txBox="1"/>
           <p:nvPr/>
         </p:nvSpPr>
@@ -13162,7 +13479,97 @@
       </p:sp>
       <p:sp>
         <p:nvSpPr>
-          <p:cNvPr id="11" name="Text 8"/>
+          <p:cNvPr id="11" name="Shape 8"/>
+          <p:cNvSpPr/>
+          <p:nvPr/>
+        </p:nvSpPr>
+        <p:spPr>
+          <a:xfrm>
+            <a:off x="6949440" y="2697480"/>
+            <a:ext cx="1737360" cy="1965960"/>
+          </a:xfrm>
+          <a:prstGeom prst="roundRect">
+            <a:avLst>
+              <a:gd name="adj" fmla="val 4211"/>
+            </a:avLst>
+          </a:prstGeom>
+          <a:solidFill>
+            <a:srgbClr val="FFFFFF"/>
+          </a:solidFill>
+          <a:ln w="12700">
+            <a:solidFill>
+              <a:srgbClr val="FFFFFF"/>
+            </a:solidFill>
+            <a:prstDash val="solid"/>
+          </a:ln>
+        </p:spPr>
+      </p:sp>
+      <p:pic>
+        <p:nvPicPr>
+          <p:cNvPr id="12" name="Image 1" descr="QR code for Malware Line-up">    </p:cNvPr>
+          <p:cNvPicPr>
+            <a:picLocks noChangeAspect="1"/>
+          </p:cNvPicPr>
+          <p:nvPr/>
+        </p:nvPicPr>
+        <p:blipFill>
+          <a:blip r:embed="rId2"/>
+          <a:stretch>
+            <a:fillRect/>
+          </a:stretch>
+        </p:blipFill>
+        <p:spPr>
+          <a:xfrm>
+            <a:off x="7059168" y="2770632"/>
+            <a:ext cx="1517904" cy="1517904"/>
+          </a:xfrm>
+          <a:prstGeom prst="rect">
+            <a:avLst/>
+          </a:prstGeom>
+        </p:spPr>
+      </p:pic>
+      <p:sp>
+        <p:nvSpPr>
+          <p:cNvPr id="13" name="Text 9"/>
+          <p:cNvSpPr txBox="1"/>
+          <p:nvPr/>
+        </p:nvSpPr>
+        <p:spPr>
+          <a:xfrm>
+            <a:off x="6949440" y="4315968"/>
+            <a:ext cx="1737360" cy="256032"/>
+          </a:xfrm>
+          <a:prstGeom prst="rect">
+            <a:avLst/>
+          </a:prstGeom>
+          <a:noFill/>
+          <a:ln/>
+        </p:spPr>
+        <p:txBody>
+          <a:bodyPr wrap="square" lIns="0" tIns="0" rIns="0" bIns="0" rtlCol="0" anchor="ctr"/>
+          <a:lstStyle/>
+          <a:p>
+            <a:pPr algn="ctr" indent="0" marL="0">
+              <a:buNone/>
+            </a:pPr>
+            <a:r>
+              <a:rPr lang="en-US" sz="1100" b="1" dirty="0">
+                <a:solidFill>
+                  <a:srgbClr val="262A20"/>
+                </a:solidFill>
+                <a:latin typeface="Open Sans" pitchFamily="34" charset="0"/>
+                <a:ea typeface="Open Sans" pitchFamily="34" charset="-122"/>
+                <a:cs typeface="Open Sans" pitchFamily="34" charset="-120"/>
+              </a:rPr>
+              <a:t>Scan to play</a:t>
+            </a:r>
+            <a:endParaRPr lang="en-US" sz="1100" dirty="0"/>
+          </a:p>
+        </p:txBody>
+      </p:sp>
+      <p:sp>
+        <p:nvSpPr>
+          <p:cNvPr id="14" name="Text 10"/>
           <p:cNvSpPr txBox="1"/>
           <p:nvPr/>
         </p:nvSpPr>
@@ -13201,7 +13608,7 @@
       </p:sp>
       <p:sp>
         <p:nvSpPr>
-          <p:cNvPr id="12" name="Text 9"/>
+          <p:cNvPr id="15" name="Text 11"/>
           <p:cNvSpPr txBox="1"/>
           <p:nvPr/>
         </p:nvSpPr>
@@ -17062,7 +17469,97 @@
       </p:sp>
       <p:sp>
         <p:nvSpPr>
-          <p:cNvPr id="11" name="Text 8"/>
+          <p:cNvPr id="11" name="Shape 8"/>
+          <p:cNvSpPr/>
+          <p:nvPr/>
+        </p:nvSpPr>
+        <p:spPr>
+          <a:xfrm>
+            <a:off x="6949440" y="2697480"/>
+            <a:ext cx="1737360" cy="1965960"/>
+          </a:xfrm>
+          <a:prstGeom prst="roundRect">
+            <a:avLst>
+              <a:gd name="adj" fmla="val 4211"/>
+            </a:avLst>
+          </a:prstGeom>
+          <a:solidFill>
+            <a:srgbClr val="FFFFFF"/>
+          </a:solidFill>
+          <a:ln w="12700">
+            <a:solidFill>
+              <a:srgbClr val="FFFFFF"/>
+            </a:solidFill>
+            <a:prstDash val="solid"/>
+          </a:ln>
+        </p:spPr>
+      </p:sp>
+      <p:pic>
+        <p:nvPicPr>
+          <p:cNvPr id="12" name="Image 1" descr="QR code for Attack Words Ladder">    </p:cNvPr>
+          <p:cNvPicPr>
+            <a:picLocks noChangeAspect="1"/>
+          </p:cNvPicPr>
+          <p:nvPr/>
+        </p:nvPicPr>
+        <p:blipFill>
+          <a:blip r:embed="rId2"/>
+          <a:stretch>
+            <a:fillRect/>
+          </a:stretch>
+        </p:blipFill>
+        <p:spPr>
+          <a:xfrm>
+            <a:off x="7059168" y="2770632"/>
+            <a:ext cx="1517904" cy="1517904"/>
+          </a:xfrm>
+          <a:prstGeom prst="rect">
+            <a:avLst/>
+          </a:prstGeom>
+        </p:spPr>
+      </p:pic>
+      <p:sp>
+        <p:nvSpPr>
+          <p:cNvPr id="13" name="Text 9"/>
+          <p:cNvSpPr txBox="1"/>
+          <p:nvPr/>
+        </p:nvSpPr>
+        <p:spPr>
+          <a:xfrm>
+            <a:off x="6949440" y="4315968"/>
+            <a:ext cx="1737360" cy="256032"/>
+          </a:xfrm>
+          <a:prstGeom prst="rect">
+            <a:avLst/>
+          </a:prstGeom>
+          <a:noFill/>
+          <a:ln/>
+        </p:spPr>
+        <p:txBody>
+          <a:bodyPr wrap="square" lIns="0" tIns="0" rIns="0" bIns="0" rtlCol="0" anchor="ctr"/>
+          <a:lstStyle/>
+          <a:p>
+            <a:pPr algn="ctr" indent="0" marL="0">
+              <a:buNone/>
+            </a:pPr>
+            <a:r>
+              <a:rPr lang="en-US" sz="1100" b="1" dirty="0">
+                <a:solidFill>
+                  <a:srgbClr val="262A20"/>
+                </a:solidFill>
+                <a:latin typeface="Open Sans" pitchFamily="34" charset="0"/>
+                <a:ea typeface="Open Sans" pitchFamily="34" charset="-122"/>
+                <a:cs typeface="Open Sans" pitchFamily="34" charset="-120"/>
+              </a:rPr>
+              <a:t>Scan to play</a:t>
+            </a:r>
+            <a:endParaRPr lang="en-US" sz="1100" dirty="0"/>
+          </a:p>
+        </p:txBody>
+      </p:sp>
+      <p:sp>
+        <p:nvSpPr>
+          <p:cNvPr id="14" name="Text 10"/>
           <p:cNvSpPr txBox="1"/>
           <p:nvPr/>
         </p:nvSpPr>
@@ -17101,7 +17598,7 @@
       </p:sp>
       <p:sp>
         <p:nvSpPr>
-          <p:cNvPr id="12" name="Text 9"/>
+          <p:cNvPr id="15" name="Text 11"/>
           <p:cNvSpPr txBox="1"/>
           <p:nvPr/>
         </p:nvSpPr>
@@ -20949,7 +21446,7 @@
         <p:spPr>
           <a:xfrm>
             <a:off x="1691640" y="1280160"/>
-            <a:ext cx="6949440" cy="457200"/>
+            <a:ext cx="3840480" cy="457200"/>
           </a:xfrm>
           <a:prstGeom prst="rect">
             <a:avLst/>
@@ -20988,23 +21485,23 @@
         <p:spPr>
           <a:xfrm>
             <a:off x="1691640" y="1737360"/>
-            <a:ext cx="6949440" cy="548640"/>
-          </a:xfrm>
-          <a:prstGeom prst="rect">
-            <a:avLst/>
-          </a:prstGeom>
-          <a:noFill/>
-          <a:ln/>
-        </p:spPr>
-        <p:txBody>
-          <a:bodyPr wrap="square" lIns="0" tIns="0" rIns="0" bIns="0" rtlCol="0" anchor="ctr"/>
+            <a:ext cx="3840480" cy="731520"/>
+          </a:xfrm>
+          <a:prstGeom prst="rect">
+            <a:avLst/>
+          </a:prstGeom>
+          <a:noFill/>
+          <a:ln/>
+        </p:spPr>
+        <p:txBody>
+          <a:bodyPr wrap="square" lIns="0" tIns="0" rIns="0" bIns="0" rtlCol="0" anchor="t"/>
           <a:lstStyle/>
           <a:p>
             <a:pPr indent="0" marL="0">
               <a:buNone/>
             </a:pPr>
             <a:r>
-              <a:rPr lang="en-US" sz="1700" dirty="0">
+              <a:rPr lang="en-US" sz="1600" dirty="0">
                 <a:solidFill>
                   <a:srgbClr val="262A20"/>
                 </a:solidFill>
@@ -21014,7 +21511,7 @@
               </a:rPr>
               <a:t>They attack to make money. They do not care who you are.</a:t>
             </a:r>
-            <a:endParaRPr lang="en-US" sz="1700" dirty="0"/>
+            <a:endParaRPr lang="en-US" sz="1600" dirty="0"/>
           </a:p>
         </p:txBody>
       </p:sp>
@@ -21026,8 +21523,8 @@
         </p:nvSpPr>
         <p:spPr>
           <a:xfrm>
-            <a:off x="457200" y="2651760"/>
-            <a:ext cx="8229600" cy="1645920"/>
+            <a:off x="457200" y="2697480"/>
+            <a:ext cx="4937760" cy="1645920"/>
           </a:xfrm>
           <a:prstGeom prst="rect">
             <a:avLst/>
@@ -21047,7 +21544,7 @@
               <a:buChar char="•"/>
             </a:pPr>
             <a:r>
-              <a:rPr lang="en-US" sz="1700" dirty="0">
+              <a:rPr lang="en-US" sz="1600" dirty="0">
                 <a:solidFill>
                   <a:srgbClr val="262A20"/>
                 </a:solidFill>
@@ -21057,7 +21554,7 @@
               </a:rPr>
               <a:t>Lock files and ask for payment.</a:t>
             </a:r>
-            <a:endParaRPr lang="en-US" sz="1700" dirty="0"/>
+            <a:endParaRPr lang="en-US" sz="1600" dirty="0"/>
           </a:p>
           <a:p>
             <a:pPr marL="342900" indent="-342900">
@@ -21068,7 +21565,7 @@
               <a:buChar char="•"/>
             </a:pPr>
             <a:r>
-              <a:rPr lang="en-US" sz="1700" dirty="0">
+              <a:rPr lang="en-US" sz="1600" dirty="0">
                 <a:solidFill>
                   <a:srgbClr val="262A20"/>
                 </a:solidFill>
@@ -21078,7 +21575,7 @@
               </a:rPr>
               <a:t>Steal card details and sell them.</a:t>
             </a:r>
-            <a:endParaRPr lang="en-US" sz="1700" dirty="0"/>
+            <a:endParaRPr lang="en-US" sz="1600" dirty="0"/>
           </a:p>
           <a:p>
             <a:pPr marL="342900" indent="-342900">
@@ -21089,7 +21586,7 @@
               <a:buChar char="•"/>
             </a:pPr>
             <a:r>
-              <a:rPr lang="en-US" sz="1700" dirty="0">
+              <a:rPr lang="en-US" sz="1600" dirty="0">
                 <a:solidFill>
                   <a:srgbClr val="262A20"/>
                 </a:solidFill>
@@ -21099,10 +21596,34 @@
               </a:rPr>
               <a:t>Send fake emails that trick staff into paying.</a:t>
             </a:r>
-            <a:endParaRPr lang="en-US" sz="1700" dirty="0"/>
-          </a:p>
-        </p:txBody>
-      </p:sp>
+            <a:endParaRPr lang="en-US" sz="1600" dirty="0"/>
+          </a:p>
+        </p:txBody>
+      </p:sp>
+      <p:pic>
+        <p:nvPicPr>
+          <p:cNvPr id="13" name="Image 1" descr="attacker">    </p:cNvPr>
+          <p:cNvPicPr>
+            <a:picLocks noChangeAspect="1"/>
+          </p:cNvPicPr>
+          <p:nvPr/>
+        </p:nvPicPr>
+        <p:blipFill>
+          <a:blip r:embed="rId2"/>
+          <a:stretch>
+            <a:fillRect/>
+          </a:stretch>
+        </p:blipFill>
+        <p:spPr>
+          <a:xfrm>
+            <a:off x="5577840" y="1715414"/>
+            <a:ext cx="3108960" cy="2238451"/>
+          </a:xfrm>
+          <a:prstGeom prst="rect">
+            <a:avLst/>
+          </a:prstGeom>
+        </p:spPr>
+      </p:pic>
     </p:spTree>
   </p:cSld>
   <p:clrMapOvr>
@@ -21311,11 +21832,11 @@
         <p:spPr>
           <a:xfrm>
             <a:off x="457200" y="1188720"/>
-            <a:ext cx="4000500" cy="2468880"/>
+            <a:ext cx="4023360" cy="2834640"/>
           </a:xfrm>
           <a:prstGeom prst="roundRect">
             <a:avLst>
-              <a:gd name="adj" fmla="val 2963"/>
+              <a:gd name="adj" fmla="val 2581"/>
             </a:avLst>
           </a:prstGeom>
           <a:solidFill>
@@ -21329,34 +21850,9 @@
           </a:ln>
         </p:spPr>
       </p:sp>
-      <p:sp>
-        <p:nvSpPr>
-          <p:cNvPr id="9" name="Shape 6"/>
-          <p:cNvSpPr/>
-          <p:nvPr/>
-        </p:nvSpPr>
-        <p:spPr>
-          <a:xfrm>
-            <a:off x="640080" y="1371600"/>
-            <a:ext cx="502920" cy="502920"/>
-          </a:xfrm>
-          <a:prstGeom prst="ellipse">
-            <a:avLst/>
-          </a:prstGeom>
-          <a:solidFill>
-            <a:srgbClr val="C7A887"/>
-          </a:solidFill>
-          <a:ln w="12700">
-            <a:solidFill>
-              <a:srgbClr val="C7A887"/>
-            </a:solidFill>
-            <a:prstDash val="solid"/>
-          </a:ln>
-        </p:spPr>
-      </p:sp>
       <p:pic>
         <p:nvPicPr>
-          <p:cNvPr id="10" name="Image 0" descr="preencoded.png">    </p:cNvPr>
+          <p:cNvPr id="9" name="Image 0" descr="angry">    </p:cNvPr>
           <p:cNvPicPr>
             <a:picLocks noChangeAspect="1"/>
           </p:cNvPicPr>
@@ -21370,8 +21866,8 @@
         </p:blipFill>
         <p:spPr>
           <a:xfrm>
-            <a:off x="765810" y="1497330"/>
-            <a:ext cx="251460" cy="251460"/>
+            <a:off x="594360" y="1641419"/>
+            <a:ext cx="1737360" cy="1929241"/>
           </a:xfrm>
           <a:prstGeom prst="rect">
             <a:avLst/>
@@ -21380,14 +21876,53 @@
       </p:pic>
       <p:sp>
         <p:nvSpPr>
+          <p:cNvPr id="10" name="Text 6"/>
+          <p:cNvSpPr txBox="1"/>
+          <p:nvPr/>
+        </p:nvSpPr>
+        <p:spPr>
+          <a:xfrm>
+            <a:off x="2423160" y="1371600"/>
+            <a:ext cx="1920240" cy="640080"/>
+          </a:xfrm>
+          <a:prstGeom prst="rect">
+            <a:avLst/>
+          </a:prstGeom>
+          <a:noFill/>
+          <a:ln/>
+        </p:spPr>
+        <p:txBody>
+          <a:bodyPr wrap="square" lIns="0" tIns="0" rIns="0" bIns="0" rtlCol="0" anchor="t"/>
+          <a:lstStyle/>
+          <a:p>
+            <a:pPr indent="0" marL="0">
+              <a:buNone/>
+            </a:pPr>
+            <a:r>
+              <a:rPr lang="en-US" sz="1600" b="1" dirty="0">
+                <a:solidFill>
+                  <a:srgbClr val="262A20"/>
+                </a:solidFill>
+                <a:latin typeface="Open Sans" pitchFamily="34" charset="0"/>
+                <a:ea typeface="Open Sans" pitchFamily="34" charset="-122"/>
+                <a:cs typeface="Open Sans" pitchFamily="34" charset="-120"/>
+              </a:rPr>
+              <a:t>The angry insider</a:t>
+            </a:r>
+            <a:endParaRPr lang="en-US" sz="1600" dirty="0"/>
+          </a:p>
+        </p:txBody>
+      </p:sp>
+      <p:sp>
+        <p:nvSpPr>
           <p:cNvPr id="11" name="Text 7"/>
           <p:cNvSpPr txBox="1"/>
           <p:nvPr/>
         </p:nvSpPr>
         <p:spPr>
           <a:xfrm>
-            <a:off x="640080" y="2011680"/>
-            <a:ext cx="3634740" cy="365760"/>
+            <a:off x="2423160" y="2057400"/>
+            <a:ext cx="1920240" cy="548640"/>
           </a:xfrm>
           <a:prstGeom prst="rect">
             <a:avLst/>
@@ -21403,7 +21938,7 @@
               <a:buNone/>
             </a:pPr>
             <a:r>
-              <a:rPr lang="en-US" sz="1500" b="1" dirty="0">
+              <a:rPr lang="en-US" sz="1400" b="1" dirty="0">
                 <a:solidFill>
                   <a:srgbClr val="262A20"/>
                 </a:solidFill>
@@ -21411,9 +21946,9 @@
                 <a:ea typeface="Open Sans" pitchFamily="34" charset="-122"/>
                 <a:cs typeface="Open Sans" pitchFamily="34" charset="-120"/>
               </a:rPr>
-              <a:t>The angry insider</a:t>
-            </a:r>
-            <a:endParaRPr lang="en-US" sz="1500" dirty="0"/>
+              <a:t>Does harm on purpose.</a:t>
+            </a:r>
+            <a:endParaRPr lang="en-US" sz="1400" dirty="0"/>
           </a:p>
         </p:txBody>
       </p:sp>
@@ -21425,8 +21960,8 @@
         </p:nvSpPr>
         <p:spPr>
           <a:xfrm>
-            <a:off x="640080" y="2395728"/>
-            <a:ext cx="3634740" cy="1143000"/>
+            <a:off x="2423160" y="2651760"/>
+            <a:ext cx="1920240" cy="1280160"/>
           </a:xfrm>
           <a:prstGeom prst="rect">
             <a:avLst/>
@@ -21442,7 +21977,7 @@
               <a:buNone/>
             </a:pPr>
             <a:r>
-              <a:rPr lang="en-US" sz="1400" dirty="0">
+              <a:rPr lang="en-US" sz="1250" dirty="0">
                 <a:solidFill>
                   <a:srgbClr val="262A20"/>
                 </a:solidFill>
@@ -21450,26 +21985,9 @@
                 <a:ea typeface="Open Sans" pitchFamily="34" charset="-122"/>
                 <a:cs typeface="Open Sans" pitchFamily="34" charset="-120"/>
               </a:rPr>
-              <a:t>Does harm on purpose.</a:t>
-            </a:r>
-            <a:endParaRPr lang="en-US" sz="1400" dirty="0"/>
-          </a:p>
-          <a:p>
-            <a:pPr indent="0" marL="0">
-              <a:buNone/>
-            </a:pPr>
-            <a:r>
-              <a:rPr lang="en-US" sz="1400" dirty="0">
-                <a:solidFill>
-                  <a:srgbClr val="262A20"/>
-                </a:solidFill>
-                <a:latin typeface="Open Sans" pitchFamily="34" charset="0"/>
-                <a:ea typeface="Open Sans" pitchFamily="34" charset="-122"/>
-                <a:cs typeface="Open Sans" pitchFamily="34" charset="-120"/>
-              </a:rPr>
-              <a:t>Example: a clerk fired last month logs in and deletes orders.</a:t>
-            </a:r>
-            <a:endParaRPr lang="en-US" sz="1400" dirty="0"/>
+              <a:t>Example: A clerk fired last month logs in and deletes orders.</a:t>
+            </a:r>
+            <a:endParaRPr lang="en-US" sz="1250" dirty="0"/>
           </a:p>
         </p:txBody>
       </p:sp>
@@ -21481,12 +21999,12 @@
         </p:nvSpPr>
         <p:spPr>
           <a:xfrm>
-            <a:off x="4686300" y="1188720"/>
-            <a:ext cx="4000500" cy="2468880"/>
+            <a:off x="4663440" y="1188720"/>
+            <a:ext cx="4023360" cy="2834640"/>
           </a:xfrm>
           <a:prstGeom prst="roundRect">
             <a:avLst>
-              <a:gd name="adj" fmla="val 2963"/>
+              <a:gd name="adj" fmla="val 2581"/>
             </a:avLst>
           </a:prstGeom>
           <a:solidFill>
@@ -21500,34 +22018,9 @@
           </a:ln>
         </p:spPr>
       </p:sp>
-      <p:sp>
-        <p:nvSpPr>
-          <p:cNvPr id="14" name="Shape 10"/>
-          <p:cNvSpPr/>
-          <p:nvPr/>
-        </p:nvSpPr>
-        <p:spPr>
-          <a:xfrm>
-            <a:off x="4869180" y="1371600"/>
-            <a:ext cx="502920" cy="502920"/>
-          </a:xfrm>
-          <a:prstGeom prst="ellipse">
-            <a:avLst/>
-          </a:prstGeom>
-          <a:solidFill>
-            <a:srgbClr val="262A20"/>
-          </a:solidFill>
-          <a:ln w="12700">
-            <a:solidFill>
-              <a:srgbClr val="262A20"/>
-            </a:solidFill>
-            <a:prstDash val="solid"/>
-          </a:ln>
-        </p:spPr>
-      </p:sp>
       <p:pic>
         <p:nvPicPr>
-          <p:cNvPr id="15" name="Image 1" descr="preencoded.png">    </p:cNvPr>
+          <p:cNvPr id="14" name="Image 1" descr="careless">    </p:cNvPr>
           <p:cNvPicPr>
             <a:picLocks noChangeAspect="1"/>
           </p:cNvPicPr>
@@ -21541,8 +22034,8 @@
         </p:blipFill>
         <p:spPr>
           <a:xfrm>
-            <a:off x="4994910" y="1497330"/>
-            <a:ext cx="251460" cy="251460"/>
+            <a:off x="4800600" y="1992404"/>
+            <a:ext cx="1737360" cy="1227271"/>
           </a:xfrm>
           <a:prstGeom prst="rect">
             <a:avLst/>
@@ -21551,14 +22044,53 @@
       </p:pic>
       <p:sp>
         <p:nvSpPr>
+          <p:cNvPr id="15" name="Text 10"/>
+          <p:cNvSpPr txBox="1"/>
+          <p:nvPr/>
+        </p:nvSpPr>
+        <p:spPr>
+          <a:xfrm>
+            <a:off x="6629400" y="1371600"/>
+            <a:ext cx="1920240" cy="640080"/>
+          </a:xfrm>
+          <a:prstGeom prst="rect">
+            <a:avLst/>
+          </a:prstGeom>
+          <a:noFill/>
+          <a:ln/>
+        </p:spPr>
+        <p:txBody>
+          <a:bodyPr wrap="square" lIns="0" tIns="0" rIns="0" bIns="0" rtlCol="0" anchor="t"/>
+          <a:lstStyle/>
+          <a:p>
+            <a:pPr indent="0" marL="0">
+              <a:buNone/>
+            </a:pPr>
+            <a:r>
+              <a:rPr lang="en-US" sz="1600" b="1" dirty="0">
+                <a:solidFill>
+                  <a:srgbClr val="262A20"/>
+                </a:solidFill>
+                <a:latin typeface="Open Sans" pitchFamily="34" charset="0"/>
+                <a:ea typeface="Open Sans" pitchFamily="34" charset="-122"/>
+                <a:cs typeface="Open Sans" pitchFamily="34" charset="-120"/>
+              </a:rPr>
+              <a:t>The careless insider</a:t>
+            </a:r>
+            <a:endParaRPr lang="en-US" sz="1600" dirty="0"/>
+          </a:p>
+        </p:txBody>
+      </p:sp>
+      <p:sp>
+        <p:nvSpPr>
           <p:cNvPr id="16" name="Text 11"/>
           <p:cNvSpPr txBox="1"/>
           <p:nvPr/>
         </p:nvSpPr>
         <p:spPr>
           <a:xfrm>
-            <a:off x="4869180" y="2011680"/>
-            <a:ext cx="3634740" cy="365760"/>
+            <a:off x="6629400" y="2057400"/>
+            <a:ext cx="1920240" cy="548640"/>
           </a:xfrm>
           <a:prstGeom prst="rect">
             <a:avLst/>
@@ -21574,7 +22106,7 @@
               <a:buNone/>
             </a:pPr>
             <a:r>
-              <a:rPr lang="en-US" sz="1500" b="1" dirty="0">
+              <a:rPr lang="en-US" sz="1400" b="1" dirty="0">
                 <a:solidFill>
                   <a:srgbClr val="262A20"/>
                 </a:solidFill>
@@ -21582,9 +22114,9 @@
                 <a:ea typeface="Open Sans" pitchFamily="34" charset="-122"/>
                 <a:cs typeface="Open Sans" pitchFamily="34" charset="-120"/>
               </a:rPr>
-              <a:t>The careless insider</a:t>
-            </a:r>
-            <a:endParaRPr lang="en-US" sz="1500" dirty="0"/>
+              <a:t>Does harm by mistake.</a:t>
+            </a:r>
+            <a:endParaRPr lang="en-US" sz="1400" dirty="0"/>
           </a:p>
         </p:txBody>
       </p:sp>
@@ -21596,8 +22128,8 @@
         </p:nvSpPr>
         <p:spPr>
           <a:xfrm>
-            <a:off x="4869180" y="2395728"/>
-            <a:ext cx="3634740" cy="1143000"/>
+            <a:off x="6629400" y="2651760"/>
+            <a:ext cx="1920240" cy="1280160"/>
           </a:xfrm>
           <a:prstGeom prst="rect">
             <a:avLst/>
@@ -21613,7 +22145,7 @@
               <a:buNone/>
             </a:pPr>
             <a:r>
-              <a:rPr lang="en-US" sz="1400" dirty="0">
+              <a:rPr lang="en-US" sz="1250" dirty="0">
                 <a:solidFill>
                   <a:srgbClr val="262A20"/>
                 </a:solidFill>
@@ -21621,26 +22153,9 @@
                 <a:ea typeface="Open Sans" pitchFamily="34" charset="-122"/>
                 <a:cs typeface="Open Sans" pitchFamily="34" charset="-120"/>
               </a:rPr>
-              <a:t>Does harm by mistake.</a:t>
-            </a:r>
-            <a:endParaRPr lang="en-US" sz="1400" dirty="0"/>
-          </a:p>
-          <a:p>
-            <a:pPr indent="0" marL="0">
-              <a:buNone/>
-            </a:pPr>
-            <a:r>
-              <a:rPr lang="en-US" sz="1400" dirty="0">
-                <a:solidFill>
-                  <a:srgbClr val="262A20"/>
-                </a:solidFill>
-                <a:latin typeface="Open Sans" pitchFamily="34" charset="0"/>
-                <a:ea typeface="Open Sans" pitchFamily="34" charset="-122"/>
-                <a:cs typeface="Open Sans" pitchFamily="34" charset="-120"/>
-              </a:rPr>
-              <a:t>Example: a staff member emails the price list to the wrong person.</a:t>
-            </a:r>
-            <a:endParaRPr lang="en-US" sz="1400" dirty="0"/>
+              <a:t>Example: A staff member emails the price list to the wrong person.</a:t>
+            </a:r>
+            <a:endParaRPr lang="en-US" sz="1250" dirty="0"/>
           </a:p>
         </p:txBody>
       </p:sp>
@@ -21652,7 +22167,7 @@
         </p:nvSpPr>
         <p:spPr>
           <a:xfrm>
-            <a:off x="457200" y="3931920"/>
+            <a:off x="457200" y="4160520"/>
             <a:ext cx="8229600" cy="411480"/>
           </a:xfrm>
           <a:prstGeom prst="rect">
@@ -21940,7 +22455,7 @@
         <p:spPr>
           <a:xfrm>
             <a:off x="1691640" y="1280160"/>
-            <a:ext cx="6949440" cy="457200"/>
+            <a:ext cx="3840480" cy="457200"/>
           </a:xfrm>
           <a:prstGeom prst="rect">
             <a:avLst/>
@@ -21979,23 +22494,23 @@
         <p:spPr>
           <a:xfrm>
             <a:off x="1691640" y="1737360"/>
-            <a:ext cx="6949440" cy="548640"/>
-          </a:xfrm>
-          <a:prstGeom prst="rect">
-            <a:avLst/>
-          </a:prstGeom>
-          <a:noFill/>
-          <a:ln/>
-        </p:spPr>
-        <p:txBody>
-          <a:bodyPr wrap="square" lIns="0" tIns="0" rIns="0" bIns="0" rtlCol="0" anchor="ctr"/>
+            <a:ext cx="3840480" cy="731520"/>
+          </a:xfrm>
+          <a:prstGeom prst="rect">
+            <a:avLst/>
+          </a:prstGeom>
+          <a:noFill/>
+          <a:ln/>
+        </p:spPr>
+        <p:txBody>
+          <a:bodyPr wrap="square" lIns="0" tIns="0" rIns="0" bIns="0" rtlCol="0" anchor="t"/>
           <a:lstStyle/>
           <a:p>
             <a:pPr indent="0" marL="0">
               <a:buNone/>
             </a:pPr>
             <a:r>
-              <a:rPr lang="en-US" sz="1700" dirty="0">
+              <a:rPr lang="en-US" sz="1600" dirty="0">
                 <a:solidFill>
                   <a:srgbClr val="262A20"/>
                 </a:solidFill>
@@ -22005,7 +22520,7 @@
               </a:rPr>
               <a:t>They attack for a cause they believe in. They want people to notice.</a:t>
             </a:r>
-            <a:endParaRPr lang="en-US" sz="1700" dirty="0"/>
+            <a:endParaRPr lang="en-US" sz="1600" dirty="0"/>
           </a:p>
         </p:txBody>
       </p:sp>
@@ -22017,8 +22532,8 @@
         </p:nvSpPr>
         <p:spPr>
           <a:xfrm>
-            <a:off x="457200" y="2651760"/>
-            <a:ext cx="8229600" cy="1645920"/>
+            <a:off x="457200" y="2697480"/>
+            <a:ext cx="4937760" cy="1645920"/>
           </a:xfrm>
           <a:prstGeom prst="rect">
             <a:avLst/>
@@ -22038,7 +22553,7 @@
               <a:buChar char="•"/>
             </a:pPr>
             <a:r>
-              <a:rPr lang="en-US" sz="1700" dirty="0">
+              <a:rPr lang="en-US" sz="1600" dirty="0">
                 <a:solidFill>
                   <a:srgbClr val="262A20"/>
                 </a:solidFill>
@@ -22048,7 +22563,7 @@
               </a:rPr>
               <a:t>Change a website to show their message.</a:t>
             </a:r>
-            <a:endParaRPr lang="en-US" sz="1700" dirty="0"/>
+            <a:endParaRPr lang="en-US" sz="1600" dirty="0"/>
           </a:p>
           <a:p>
             <a:pPr marL="342900" indent="-342900">
@@ -22059,7 +22574,7 @@
               <a:buChar char="•"/>
             </a:pPr>
             <a:r>
-              <a:rPr lang="en-US" sz="1700" dirty="0">
+              <a:rPr lang="en-US" sz="1600" dirty="0">
                 <a:solidFill>
                   <a:srgbClr val="262A20"/>
                 </a:solidFill>
@@ -22069,7 +22584,7 @@
               </a:rPr>
               <a:t>Flood a website so nobody can use it.</a:t>
             </a:r>
-            <a:endParaRPr lang="en-US" sz="1700" dirty="0"/>
+            <a:endParaRPr lang="en-US" sz="1600" dirty="0"/>
           </a:p>
           <a:p>
             <a:pPr marL="342900" indent="-342900">
@@ -22080,7 +22595,7 @@
               <a:buChar char="•"/>
             </a:pPr>
             <a:r>
-              <a:rPr lang="en-US" sz="1700" dirty="0">
+              <a:rPr lang="en-US" sz="1600" dirty="0">
                 <a:solidFill>
                   <a:srgbClr val="262A20"/>
                 </a:solidFill>
@@ -22090,10 +22605,34 @@
               </a:rPr>
               <a:t>Leak documents to embarrass a company.</a:t>
             </a:r>
-            <a:endParaRPr lang="en-US" sz="1700" dirty="0"/>
-          </a:p>
-        </p:txBody>
-      </p:sp>
+            <a:endParaRPr lang="en-US" sz="1600" dirty="0"/>
+          </a:p>
+        </p:txBody>
+      </p:sp>
+      <p:pic>
+        <p:nvPicPr>
+          <p:cNvPr id="13" name="Image 1" descr="activist">    </p:cNvPr>
+          <p:cNvPicPr>
+            <a:picLocks noChangeAspect="1"/>
+          </p:cNvPicPr>
+          <p:nvPr/>
+        </p:nvPicPr>
+        <p:blipFill>
+          <a:blip r:embed="rId2"/>
+          <a:stretch>
+            <a:fillRect/>
+          </a:stretch>
+        </p:blipFill>
+        <p:spPr>
+          <a:xfrm>
+            <a:off x="5486400" y="1518920"/>
+            <a:ext cx="3200400" cy="2631440"/>
+          </a:xfrm>
+          <a:prstGeom prst="rect">
+            <a:avLst/>
+          </a:prstGeom>
+        </p:spPr>
+      </p:pic>
     </p:spTree>
   </p:cSld>
   <p:clrMapOvr>

--- a/slides/11-02-who-attacks-and-how.pptx
+++ b/slides/11-02-who-attacks-and-how.pptx
@@ -3746,17 +3746,17 @@
         </p:nvSpPr>
         <p:spPr>
           <a:xfrm>
-            <a:off x="457200" y="4526280"/>
-            <a:ext cx="8229600" cy="201168"/>
-          </a:xfrm>
-          <a:prstGeom prst="rect">
-            <a:avLst/>
-          </a:prstGeom>
-          <a:noFill/>
-          <a:ln/>
-        </p:spPr>
-        <p:txBody>
-          <a:bodyPr wrap="square" lIns="0" tIns="0" rIns="0" bIns="0" rtlCol="0" anchor="ctr"/>
+            <a:off x="457200" y="4407408"/>
+            <a:ext cx="8229600" cy="329184"/>
+          </a:xfrm>
+          <a:prstGeom prst="rect">
+            <a:avLst/>
+          </a:prstGeom>
+          <a:noFill/>
+          <a:ln/>
+        </p:spPr>
+        <p:txBody>
+          <a:bodyPr wrap="square" lIns="0" tIns="0" rIns="0" bIns="0" rtlCol="0" anchor="t"/>
           <a:lstStyle/>
           <a:p>
             <a:pPr indent="0" marL="0">
@@ -3771,7 +3771,24 @@
                 <a:ea typeface="Open Sans" pitchFamily="34" charset="-122"/>
                 <a:cs typeface="Open Sans" pitchFamily="34" charset="-120"/>
               </a:rPr>
-              <a:t>© 2026 Niranga Dharmaratna. Licensed CC BY-NC-SA 4.0. Icons: Font Awesome Free (CC BY 4.0). Illustrations: original, same licence.</a:t>
+              <a:t>© 2026 Niranga Dharmaratna, School of Computing &amp; Engineering, National Institute of Business Management</a:t>
+            </a:r>
+            <a:endParaRPr lang="en-US" sz="750" dirty="0"/>
+          </a:p>
+          <a:p>
+            <a:pPr indent="0" marL="0">
+              <a:buNone/>
+            </a:pPr>
+            <a:r>
+              <a:rPr lang="en-US" sz="750" dirty="0">
+                <a:solidFill>
+                  <a:srgbClr val="A39E98"/>
+                </a:solidFill>
+                <a:latin typeface="Open Sans" pitchFamily="34" charset="0"/>
+                <a:ea typeface="Open Sans" pitchFamily="34" charset="-122"/>
+                <a:cs typeface="Open Sans" pitchFamily="34" charset="-120"/>
+              </a:rPr>
+              <a:t>Licensed CC BY-NC-SA 4.0. Icons: Font Awesome Free (CC BY 4.0). Illustrations: original, same licence.</a:t>
             </a:r>
             <a:endParaRPr lang="en-US" sz="750" dirty="0"/>
           </a:p>

--- a/slides/11-02-who-attacks-and-how.pptx
+++ b/slides/11-02-who-attacks-and-how.pptx
@@ -3538,7 +3538,7 @@
                 <a:ea typeface="Open Sans" pitchFamily="34" charset="-122"/>
                 <a:cs typeface="Open Sans" pitchFamily="34" charset="-120"/>
               </a:rPr>
-              <a:t>DBIS-11  |  Day 1  |  Session 11.2  |  1:00 to 4:00</a:t>
+              <a:t>DBIS-11  |  Day 1  |  Session 11.2</a:t>
             </a:r>
             <a:endParaRPr lang="en-US" sz="1400" dirty="0"/>
           </a:p>
@@ -3683,7 +3683,7 @@
                 <a:ea typeface="Open Sans" pitchFamily="34" charset="-122"/>
                 <a:cs typeface="Open Sans" pitchFamily="34" charset="-120"/>
               </a:rPr>
-              <a:t>Test 1 at 3:00</a:t>
+              <a:t>Includes Test 1</a:t>
             </a:r>
             <a:endParaRPr lang="en-US" sz="1500" dirty="0"/>
           </a:p>
@@ -3746,6 +3746,45 @@
         </p:nvSpPr>
         <p:spPr>
           <a:xfrm>
+            <a:off x="457200" y="4023360"/>
+            <a:ext cx="4937760" cy="274320"/>
+          </a:xfrm>
+          <a:prstGeom prst="rect">
+            <a:avLst/>
+          </a:prstGeom>
+          <a:noFill/>
+          <a:ln/>
+        </p:spPr>
+        <p:txBody>
+          <a:bodyPr wrap="square" lIns="0" tIns="0" rIns="0" bIns="0" rtlCol="0" anchor="ctr"/>
+          <a:lstStyle/>
+          <a:p>
+            <a:pPr indent="0" marL="0">
+              <a:buNone/>
+            </a:pPr>
+            <a:r>
+              <a:rPr lang="en-US" sz="1200" b="1" dirty="0">
+                <a:solidFill>
+                  <a:srgbClr val="C7A887"/>
+                </a:solidFill>
+                <a:latin typeface="Open Sans" pitchFamily="34" charset="0"/>
+                <a:ea typeface="Open Sans" pitchFamily="34" charset="-122"/>
+                <a:cs typeface="Open Sans" pitchFamily="34" charset="-120"/>
+              </a:rPr>
+              <a:t>Niranga Dharmaratna - niranga@nibm.lk</a:t>
+            </a:r>
+            <a:endParaRPr lang="en-US" sz="1200" dirty="0"/>
+          </a:p>
+        </p:txBody>
+      </p:sp>
+      <p:sp>
+        <p:nvSpPr>
+          <p:cNvPr id="12" name="Text 8"/>
+          <p:cNvSpPr txBox="1"/>
+          <p:nvPr/>
+        </p:nvSpPr>
+        <p:spPr>
+          <a:xfrm>
             <a:off x="457200" y="4407408"/>
             <a:ext cx="8229600" cy="329184"/>
           </a:xfrm>
@@ -3796,7 +3835,7 @@
       </p:sp>
       <p:sp>
         <p:nvSpPr>
-          <p:cNvPr id="12" name="Text 8"/>
+          <p:cNvPr id="13" name="Text 9"/>
           <p:cNvSpPr txBox="1"/>
           <p:nvPr/>
         </p:nvSpPr>
@@ -3835,7 +3874,7 @@
       </p:sp>
       <p:sp>
         <p:nvSpPr>
-          <p:cNvPr id="13" name="Text 9"/>
+          <p:cNvPr id="14" name="Text 10"/>
           <p:cNvSpPr txBox="1"/>
           <p:nvPr/>
         </p:nvSpPr>
